--- a/проект.pptx
+++ b/проект.pptx
@@ -11,7 +11,8 @@
     <p:sldId id="259" r:id="rId5"/>
     <p:sldId id="260" r:id="rId6"/>
     <p:sldId id="261" r:id="rId7"/>
-    <p:sldId id="262" r:id="rId8"/>
+    <p:sldId id="263" r:id="rId8"/>
+    <p:sldId id="262" r:id="rId9"/>
   </p:sldIdLst>
   <p:sldSz cx="12192000" cy="6858000"/>
   <p:notesSz cx="6858000" cy="9144000"/>
@@ -110,6 +111,11 @@
       </a:defRPr>
     </a:lvl9pPr>
   </p:defaultTextStyle>
+  <p:extLst>
+    <p:ext uri="{EFAFB233-063F-42B5-8137-9DF3F51BA10A}">
+      <p15:sldGuideLst xmlns:p15="http://schemas.microsoft.com/office/powerpoint/2012/main"/>
+    </p:ext>
+  </p:extLst>
 </p:presentation>
 </file>
 
@@ -4542,6 +4548,146 @@
 </file>
 
 <file path=ppt/slides/slide7.xml><?xml version="1.0" encoding="utf-8"?>
+<p:sld xmlns:a="http://schemas.openxmlformats.org/drawingml/2006/main" xmlns:r="http://schemas.openxmlformats.org/officeDocument/2006/relationships" xmlns:p="http://schemas.openxmlformats.org/presentationml/2006/main">
+  <p:cSld>
+    <p:spTree>
+      <p:nvGrpSpPr>
+        <p:cNvPr id="1" name=""/>
+        <p:cNvGrpSpPr/>
+        <p:nvPr/>
+      </p:nvGrpSpPr>
+      <p:grpSpPr>
+        <a:xfrm>
+          <a:off x="0" y="0"/>
+          <a:ext cx="0" cy="0"/>
+          <a:chOff x="0" y="0"/>
+          <a:chExt cx="0" cy="0"/>
+        </a:xfrm>
+      </p:grpSpPr>
+      <p:sp>
+        <p:nvSpPr>
+          <p:cNvPr id="2" name="Заголовок 1">
+            <a:extLst>
+              <a:ext uri="{FF2B5EF4-FFF2-40B4-BE49-F238E27FC236}">
+                <a16:creationId xmlns:a16="http://schemas.microsoft.com/office/drawing/2014/main" id="{577BBB9C-9659-5841-FB00-D01306161304}"/>
+              </a:ext>
+            </a:extLst>
+          </p:cNvPr>
+          <p:cNvSpPr>
+            <a:spLocks noGrp="1"/>
+          </p:cNvSpPr>
+          <p:nvPr>
+            <p:ph type="title"/>
+          </p:nvPr>
+        </p:nvSpPr>
+        <p:spPr/>
+        <p:txBody>
+          <a:bodyPr>
+            <a:normAutofit/>
+          </a:bodyPr>
+          <a:lstStyle/>
+          <a:p>
+            <a:r>
+              <a:rPr lang="ru-RU" dirty="0"/>
+              <a:t>База</a:t>
+            </a:r>
+          </a:p>
+        </p:txBody>
+      </p:sp>
+      <p:sp>
+        <p:nvSpPr>
+          <p:cNvPr id="3" name="Объект 2">
+            <a:extLst>
+              <a:ext uri="{FF2B5EF4-FFF2-40B4-BE49-F238E27FC236}">
+                <a16:creationId xmlns:a16="http://schemas.microsoft.com/office/drawing/2014/main" id="{35EA10F2-DDE7-7A99-6692-A13B9C15F568}"/>
+              </a:ext>
+            </a:extLst>
+          </p:cNvPr>
+          <p:cNvSpPr>
+            <a:spLocks noGrp="1"/>
+          </p:cNvSpPr>
+          <p:nvPr>
+            <p:ph idx="1"/>
+          </p:nvPr>
+        </p:nvSpPr>
+        <p:spPr>
+          <a:xfrm>
+            <a:off x="888749" y="1690688"/>
+            <a:ext cx="3701358" cy="4351338"/>
+          </a:xfrm>
+        </p:spPr>
+        <p:txBody>
+          <a:bodyPr/>
+          <a:lstStyle/>
+          <a:p>
+            <a:pPr marL="0" indent="0">
+              <a:buNone/>
+            </a:pPr>
+            <a:r>
+              <a:rPr lang="ru-RU" dirty="0"/>
+              <a:t>Все данные об играх хранятся в </a:t>
+            </a:r>
+            <a:r>
+              <a:rPr lang="en-US" dirty="0"/>
+              <a:t>JSON </a:t>
+            </a:r>
+            <a:r>
+              <a:rPr lang="ru-RU" dirty="0"/>
+              <a:t>файле</a:t>
+            </a:r>
+          </a:p>
+          <a:p>
+            <a:pPr marL="0" indent="0">
+              <a:buNone/>
+            </a:pPr>
+            <a:endParaRPr lang="ru-RU" dirty="0"/>
+          </a:p>
+        </p:txBody>
+      </p:sp>
+      <p:pic>
+        <p:nvPicPr>
+          <p:cNvPr id="5" name="Рисунок 4">
+            <a:extLst>
+              <a:ext uri="{FF2B5EF4-FFF2-40B4-BE49-F238E27FC236}">
+                <a16:creationId xmlns:a16="http://schemas.microsoft.com/office/drawing/2014/main" id="{4E7697F5-7F8D-A10B-3727-BB6FF249AC69}"/>
+              </a:ext>
+            </a:extLst>
+          </p:cNvPr>
+          <p:cNvPicPr>
+            <a:picLocks noChangeAspect="1"/>
+          </p:cNvPicPr>
+          <p:nvPr/>
+        </p:nvPicPr>
+        <p:blipFill>
+          <a:blip r:embed="rId2"/>
+          <a:stretch>
+            <a:fillRect/>
+          </a:stretch>
+        </p:blipFill>
+        <p:spPr>
+          <a:xfrm>
+            <a:off x="4645614" y="694853"/>
+            <a:ext cx="7546386" cy="5468293"/>
+          </a:xfrm>
+          <a:prstGeom prst="rect">
+            <a:avLst/>
+          </a:prstGeom>
+        </p:spPr>
+      </p:pic>
+    </p:spTree>
+    <p:extLst>
+      <p:ext uri="{BB962C8B-B14F-4D97-AF65-F5344CB8AC3E}">
+        <p14:creationId xmlns:p14="http://schemas.microsoft.com/office/powerpoint/2010/main" val="1790472720"/>
+      </p:ext>
+    </p:extLst>
+  </p:cSld>
+  <p:clrMapOvr>
+    <a:masterClrMapping/>
+  </p:clrMapOvr>
+</p:sld>
+</file>
+
+<file path=ppt/slides/slide8.xml><?xml version="1.0" encoding="utf-8"?>
 <p:sld xmlns:a="http://schemas.openxmlformats.org/drawingml/2006/main" xmlns:r="http://schemas.openxmlformats.org/officeDocument/2006/relationships" xmlns:p="http://schemas.openxmlformats.org/presentationml/2006/main">
   <p:cSld>
     <p:spTree>
